--- a/decks/maths-sequences/maths-sequences_ch3_continue-linear.pptx
+++ b/decks/maths-sequences/maths-sequences_ch3_continue-linear.pptx
@@ -121,47 +121,47 @@
   <p:extLst>
     <p:ext uri="{521415D9-36F7-43E2-AB2F-B90AF26B5E84}">
       <p14:sectionLst xmlns:p14="http://schemas.microsoft.com/office/powerpoint/2010/main">
-        <p14:section name="Opening" id="{7a4fa539-cd6d-413c-73c4-54939ffedfa7}">
+        <p14:section name="Opening" id="{181d9239-e3db-8b52-9646-5df3c0adbc00}">
           <p14:sldIdLst>
             <p14:sldId id="256"/>
           </p14:sldIdLst>
         </p14:section>
-        <p14:section name="Gate" id="{7de0e791-9783-ec29-8f6e-91da7cf2efb0}">
+        <p14:section name="Gate" id="{d813d671-e704-bda7-484c-e12b18414e2e}">
           <p14:sldIdLst>
             <p14:sldId id="257"/>
             <p14:sldId id="258"/>
           </p14:sldIdLst>
         </p14:section>
-        <p14:section name="Pre-teach" id="{35678837-a020-c136-28be-e79a4ef5268c}">
+        <p14:section name="Pre-teach" id="{8c2096eb-8586-6631-ccdc-5ad19e38506e}">
           <p14:sldIdLst>
             <p14:sldId id="259"/>
           </p14:sldIdLst>
         </p14:section>
-        <p14:section name="Read-along" id="{73ed25b6-6618-6c7d-741f-2a086169922e}">
+        <p14:section name="Read-along" id="{907d381a-7de4-7912-4c3a-2a7ef97cf8a0}">
           <p14:sldIdLst>
             <p14:sldId id="260"/>
             <p14:sldId id="261"/>
           </p14:sldIdLst>
         </p14:section>
-        <p14:section name="Teach" id="{2a1b9876-cb0b-d605-e550-2112226da6fd}">
+        <p14:section name="Teach" id="{bb5189df-a8e7-0252-74d4-45bb6b3bdec7}">
           <p14:sldIdLst>
             <p14:sldId id="262"/>
             <p14:sldId id="263"/>
             <p14:sldId id="264"/>
           </p14:sldIdLst>
         </p14:section>
-        <p14:section name="Routes" id="{447833a3-0d21-4e3a-a876-bd908664b26d}">
+        <p14:section name="Routes" id="{6a99e346-8e2f-1ec4-2354-357adf8e1743}">
           <p14:sldIdLst>
             <p14:sldId id="265"/>
             <p14:sldId id="266"/>
           </p14:sldIdLst>
         </p14:section>
-        <p14:section name="Close" id="{cd513ce1-6bb2-b587-c082-e3846f1a49c8}">
+        <p14:section name="Close" id="{20fa0bc6-0de5-2a12-ad15-29dca6a55c17}">
           <p14:sldIdLst>
             <p14:sldId id="267"/>
           </p14:sldIdLst>
         </p14:section>
-        <p14:section name="Answers" id="{8515109e-6950-cb22-e03c-9dcb6e2a5267}">
+        <p14:section name="Answers" id="{ec1bacb6-4d7d-8b8b-567e-1ae4f687efd9}">
           <p14:sldIdLst>
             <p14:sldId id="268"/>
             <p14:sldId id="269"/>
@@ -853,7 +853,7 @@
               <a:rPr lang="en-US" dirty="0"/>
               <a:t>Exit ticket — individual, silent, on a slip or mini-whiteboard. Recall before help: no notes, no lanes, no hints. Collect before pupils leave.
 Question: Here is a linear sequence: 14, 9, 4, −1, … What is the next term?
-Answer: A   −6. The common difference is 5 and the terms go down. −1 − 5 = −6.
+Answer: D   −6. The common difference is 5 and the terms go down. −1 − 5 = −6.
 Source of this question: module 3 task ("Below zero") from the manifest.
 Sort the slips: correct → ready to move on; incorrect → start next lesson in the pre-teach group, with the read-along and the Support lane. Same destination next time.</a:t>
             </a:r>
@@ -1126,7 +1126,7 @@
             <a:r>
               <a:rPr lang="en-US" dirty="0"/>
               <a:t>Answers — exit ticket: Exit ticket. Reveal the answer; pupils mark their own work in a different colour, then read the "why" together. Same destination for every lane, so one answer serves the whole class.
-Answer: A   −6
+Answer: D   −6
 Why: The common difference is 5 and the terms go down. −1 − 5 = −6.
 Ask a Support pupil to explain one step, and a Stretch pupil to share their extension.</a:t>
             </a:r>
@@ -1218,7 +1218,7 @@
               <a:rPr lang="en-US" dirty="0"/>
               <a:t>Do now — retrieval. Silent, no notes, no help: recall comes before any support. Give about four minutes.
 1. What is the next term of 31, 27, 23, 19, …?  →  15
-2. What is the next term of 0.8, 1.3, 1.8, 2.3, …?  →  A   2.8
+2. What is the next term of 0.8, 1.3, 1.8, 2.3, …?  →  B   2.8
 3. The term-to-term rule of 40, 34, 28, 22 is ___ 6 from the previous term.  →  subtract
 Circulate: who gets 3/3 (Stretch route), 2/3 (Core), 0–1 (Support)? Use this to route pupils later in the lesson.</a:t>
             </a:r>
@@ -1310,7 +1310,7 @@
               <a:rPr lang="en-US" dirty="0"/>
               <a:t>Answers — pupils mark their own in a different colour, then hands up for 3/3, 2/3, 1/3.
 1. 15. The common difference is 4 and the terms go down, so the next term is 19 − 4 = 15.
-2. A   2.8. The common difference is 0.5, so the next term is 2.3 + 0.5 = 2.8.
+2. B   2.8. The common difference is 0.5, so the next term is 2.3 + 0.5 = 2.8.
 3. subtract. Each term is 6 less than the one before, so the rule is subtract 6 from the previous term.
 Say the route each score points to: 3/3 Stretch, 2/3 Core, 0–1 Support. Pupils may choose to move up.</a:t>
             </a:r>
@@ -5808,7 +5808,7 @@
                 <a:ea typeface="Calibri" pitchFamily="34" charset="-122"/>
                 <a:cs typeface="Calibri" pitchFamily="34" charset="-120"/>
               </a:rPr>
-              <a:t>−6</a:t>
+              <a:t>−5</a:t>
             </a:r>
             <a:endParaRPr lang="en-US" sz="2400" dirty="0"/>
           </a:p>
@@ -5845,7 +5845,7 @@
                 <a:ea typeface="Calibri" pitchFamily="34" charset="-122"/>
                 <a:cs typeface="Calibri" pitchFamily="34" charset="-120"/>
               </a:rPr>
-              <a:t>−5</a:t>
+              <a:t>4</a:t>
             </a:r>
             <a:endParaRPr lang="en-US" sz="2400" dirty="0"/>
           </a:p>
@@ -5882,7 +5882,7 @@
                 <a:ea typeface="Calibri" pitchFamily="34" charset="-122"/>
                 <a:cs typeface="Calibri" pitchFamily="34" charset="-120"/>
               </a:rPr>
-              <a:t>4</a:t>
+              <a:t>6</a:t>
             </a:r>
             <a:endParaRPr lang="en-US" sz="2400" dirty="0"/>
           </a:p>
@@ -5919,7 +5919,7 @@
                 <a:ea typeface="Calibri" pitchFamily="34" charset="-122"/>
                 <a:cs typeface="Calibri" pitchFamily="34" charset="-120"/>
               </a:rPr>
-              <a:t>6</a:t>
+              <a:t>−6</a:t>
             </a:r>
             <a:endParaRPr lang="en-US" sz="2400" dirty="0"/>
           </a:p>
@@ -7242,7 +7242,7 @@
                 <a:ea typeface="Cambria" pitchFamily="34" charset="-122"/>
                 <a:cs typeface="Cambria" pitchFamily="34" charset="-120"/>
               </a:rPr>
-              <a:t>A   −6</a:t>
+              <a:t>D   −6</a:t>
             </a:r>
             <a:endParaRPr lang="en-US" sz="1800" dirty="0"/>
           </a:p>
@@ -7974,7 +7974,7 @@
                 <a:ea typeface="Calibri" pitchFamily="34" charset="-122"/>
                 <a:cs typeface="Calibri" pitchFamily="34" charset="-120"/>
               </a:rPr>
-              <a:t>2.8</a:t>
+              <a:t>3.3</a:t>
             </a:r>
             <a:endParaRPr lang="en-US" sz="2400" dirty="0"/>
           </a:p>
@@ -8011,7 +8011,7 @@
                 <a:ea typeface="Calibri" pitchFamily="34" charset="-122"/>
                 <a:cs typeface="Calibri" pitchFamily="34" charset="-120"/>
               </a:rPr>
-              <a:t>2.5</a:t>
+              <a:t>2.8</a:t>
             </a:r>
             <a:endParaRPr lang="en-US" sz="2400" dirty="0"/>
           </a:p>
@@ -8048,7 +8048,7 @@
                 <a:ea typeface="Calibri" pitchFamily="34" charset="-122"/>
                 <a:cs typeface="Calibri" pitchFamily="34" charset="-120"/>
               </a:rPr>
-              <a:t>3.3</a:t>
+              <a:t>2.33</a:t>
             </a:r>
             <a:endParaRPr lang="en-US" sz="2400" dirty="0"/>
           </a:p>
@@ -8085,7 +8085,7 @@
                 <a:ea typeface="Calibri" pitchFamily="34" charset="-122"/>
                 <a:cs typeface="Calibri" pitchFamily="34" charset="-120"/>
               </a:rPr>
-              <a:t>2.33</a:t>
+              <a:t>2.5</a:t>
             </a:r>
             <a:endParaRPr lang="en-US" sz="2400" dirty="0"/>
           </a:p>
@@ -8934,7 +8934,7 @@
                 <a:ea typeface="Calibri" pitchFamily="34" charset="-122"/>
                 <a:cs typeface="Calibri" pitchFamily="34" charset="-120"/>
               </a:rPr>
-              <a:t>A   2.8</a:t>
+              <a:t>B   2.8</a:t>
             </a:r>
             <a:endParaRPr lang="en-US" sz="2200" dirty="0"/>
           </a:p>

--- a/decks/maths-sequences/maths-sequences_ch3_continue-linear.pptx
+++ b/decks/maths-sequences/maths-sequences_ch3_continue-linear.pptx
@@ -121,47 +121,47 @@
   <p:extLst>
     <p:ext uri="{521415D9-36F7-43E2-AB2F-B90AF26B5E84}">
       <p14:sectionLst xmlns:p14="http://schemas.microsoft.com/office/powerpoint/2010/main">
-        <p14:section name="Opening" id="{181d9239-e3db-8b52-9646-5df3c0adbc00}">
+        <p14:section name="Opening" id="{30fc3a81-64db-be91-848d-103f869b2779}">
           <p14:sldIdLst>
             <p14:sldId id="256"/>
           </p14:sldIdLst>
         </p14:section>
-        <p14:section name="Gate" id="{d813d671-e704-bda7-484c-e12b18414e2e}">
+        <p14:section name="Gate" id="{bc130696-6d94-58eb-c0bb-921d6e870aea}">
           <p14:sldIdLst>
             <p14:sldId id="257"/>
             <p14:sldId id="258"/>
           </p14:sldIdLst>
         </p14:section>
-        <p14:section name="Pre-teach" id="{8c2096eb-8586-6631-ccdc-5ad19e38506e}">
+        <p14:section name="Pre-teach" id="{6372b892-05af-6334-d08b-198784b88fc2}">
           <p14:sldIdLst>
             <p14:sldId id="259"/>
           </p14:sldIdLst>
         </p14:section>
-        <p14:section name="Read-along" id="{907d381a-7de4-7912-4c3a-2a7ef97cf8a0}">
+        <p14:section name="Read-along" id="{cd3480cc-bb2c-87e8-6729-cce809af6c69}">
           <p14:sldIdLst>
             <p14:sldId id="260"/>
             <p14:sldId id="261"/>
           </p14:sldIdLst>
         </p14:section>
-        <p14:section name="Teach" id="{bb5189df-a8e7-0252-74d4-45bb6b3bdec7}">
+        <p14:section name="Teach" id="{7751abfc-6af8-c722-9fe2-e6b31bfc237a}">
           <p14:sldIdLst>
             <p14:sldId id="262"/>
             <p14:sldId id="263"/>
             <p14:sldId id="264"/>
           </p14:sldIdLst>
         </p14:section>
-        <p14:section name="Routes" id="{6a99e346-8e2f-1ec4-2354-357adf8e1743}">
+        <p14:section name="Routes" id="{b55f384a-034a-9e9b-cd82-dc97a6162f83}">
           <p14:sldIdLst>
             <p14:sldId id="265"/>
             <p14:sldId id="266"/>
           </p14:sldIdLst>
         </p14:section>
-        <p14:section name="Close" id="{20fa0bc6-0de5-2a12-ad15-29dca6a55c17}">
+        <p14:section name="Close" id="{22ab0d8f-5c07-221c-39cd-5643563382b0}">
           <p14:sldIdLst>
             <p14:sldId id="267"/>
           </p14:sldIdLst>
         </p14:section>
-        <p14:section name="Answers" id="{ec1bacb6-4d7d-8b8b-567e-1ae4f687efd9}">
+        <p14:section name="Answers" id="{9a986bcd-a40f-9bf7-3ef3-04d02b3cb123}">
           <p14:sldIdLst>
             <p14:sldId id="268"/>
             <p14:sldId id="269"/>
